--- a/exercises/Quick-Start-RMQ.pptx
+++ b/exercises/Quick-Start-RMQ.pptx
@@ -206,7 +206,7 @@
           <a:p>
             <a:fld id="{DE259937-BCEE-454C-90E2-F34CAEBA86D9}" type="datetimeFigureOut">
               <a:rPr lang="en-US" smtClean="0"/>
-              <a:t>9/30/24</a:t>
+              <a:t>10/20/25</a:t>
             </a:fld>
             <a:endParaRPr lang="en-US"/>
           </a:p>
@@ -1694,7 +1694,7 @@
           <a:p>
             <a:fld id="{88791E44-5F57-7348-8B6B-4131483D2266}" type="datetimeFigureOut">
               <a:rPr lang="en-US" smtClean="0"/>
-              <a:t>9/30/24</a:t>
+              <a:t>10/20/25</a:t>
             </a:fld>
             <a:endParaRPr lang="en-US"/>
           </a:p>
@@ -1894,7 +1894,7 @@
           <a:p>
             <a:fld id="{88791E44-5F57-7348-8B6B-4131483D2266}" type="datetimeFigureOut">
               <a:rPr lang="en-US" smtClean="0"/>
-              <a:t>9/30/24</a:t>
+              <a:t>10/20/25</a:t>
             </a:fld>
             <a:endParaRPr lang="en-US"/>
           </a:p>
@@ -2104,7 +2104,7 @@
           <a:p>
             <a:fld id="{88791E44-5F57-7348-8B6B-4131483D2266}" type="datetimeFigureOut">
               <a:rPr lang="en-US" smtClean="0"/>
-              <a:t>9/30/24</a:t>
+              <a:t>10/20/25</a:t>
             </a:fld>
             <a:endParaRPr lang="en-US"/>
           </a:p>
@@ -2304,7 +2304,7 @@
           <a:p>
             <a:fld id="{88791E44-5F57-7348-8B6B-4131483D2266}" type="datetimeFigureOut">
               <a:rPr lang="en-US" smtClean="0"/>
-              <a:t>9/30/24</a:t>
+              <a:t>10/20/25</a:t>
             </a:fld>
             <a:endParaRPr lang="en-US"/>
           </a:p>
@@ -2580,7 +2580,7 @@
           <a:p>
             <a:fld id="{88791E44-5F57-7348-8B6B-4131483D2266}" type="datetimeFigureOut">
               <a:rPr lang="en-US" smtClean="0"/>
-              <a:t>9/30/24</a:t>
+              <a:t>10/20/25</a:t>
             </a:fld>
             <a:endParaRPr lang="en-US"/>
           </a:p>
@@ -2848,7 +2848,7 @@
           <a:p>
             <a:fld id="{88791E44-5F57-7348-8B6B-4131483D2266}" type="datetimeFigureOut">
               <a:rPr lang="en-US" smtClean="0"/>
-              <a:t>9/30/24</a:t>
+              <a:t>10/20/25</a:t>
             </a:fld>
             <a:endParaRPr lang="en-US"/>
           </a:p>
@@ -3263,7 +3263,7 @@
           <a:p>
             <a:fld id="{88791E44-5F57-7348-8B6B-4131483D2266}" type="datetimeFigureOut">
               <a:rPr lang="en-US" smtClean="0"/>
-              <a:t>9/30/24</a:t>
+              <a:t>10/20/25</a:t>
             </a:fld>
             <a:endParaRPr lang="en-US"/>
           </a:p>
@@ -3405,7 +3405,7 @@
           <a:p>
             <a:fld id="{88791E44-5F57-7348-8B6B-4131483D2266}" type="datetimeFigureOut">
               <a:rPr lang="en-US" smtClean="0"/>
-              <a:t>9/30/24</a:t>
+              <a:t>10/20/25</a:t>
             </a:fld>
             <a:endParaRPr lang="en-US"/>
           </a:p>
@@ -3518,7 +3518,7 @@
           <a:p>
             <a:fld id="{88791E44-5F57-7348-8B6B-4131483D2266}" type="datetimeFigureOut">
               <a:rPr lang="en-US" smtClean="0"/>
-              <a:t>9/30/24</a:t>
+              <a:t>10/20/25</a:t>
             </a:fld>
             <a:endParaRPr lang="en-US"/>
           </a:p>
@@ -3831,7 +3831,7 @@
           <a:p>
             <a:fld id="{88791E44-5F57-7348-8B6B-4131483D2266}" type="datetimeFigureOut">
               <a:rPr lang="en-US" smtClean="0"/>
-              <a:t>9/30/24</a:t>
+              <a:t>10/20/25</a:t>
             </a:fld>
             <a:endParaRPr lang="en-US"/>
           </a:p>
@@ -4120,7 +4120,7 @@
           <a:p>
             <a:fld id="{88791E44-5F57-7348-8B6B-4131483D2266}" type="datetimeFigureOut">
               <a:rPr lang="en-US" smtClean="0"/>
-              <a:t>9/30/24</a:t>
+              <a:t>10/20/25</a:t>
             </a:fld>
             <a:endParaRPr lang="en-US"/>
           </a:p>
@@ -4363,7 +4363,7 @@
           <a:p>
             <a:fld id="{88791E44-5F57-7348-8B6B-4131483D2266}" type="datetimeFigureOut">
               <a:rPr lang="en-US" smtClean="0"/>
-              <a:t>9/30/24</a:t>
+              <a:t>10/20/25</a:t>
             </a:fld>
             <a:endParaRPr lang="en-US"/>
           </a:p>

--- a/exercises/Quick-Start-RMQ.pptx
+++ b/exercises/Quick-Start-RMQ.pptx
@@ -206,7 +206,7 @@
           <a:p>
             <a:fld id="{DE259937-BCEE-454C-90E2-F34CAEBA86D9}" type="datetimeFigureOut">
               <a:rPr lang="en-US" smtClean="0"/>
-              <a:t>10/20/25</a:t>
+              <a:t>9/13/26</a:t>
             </a:fld>
             <a:endParaRPr lang="en-US"/>
           </a:p>
@@ -1694,7 +1694,7 @@
           <a:p>
             <a:fld id="{88791E44-5F57-7348-8B6B-4131483D2266}" type="datetimeFigureOut">
               <a:rPr lang="en-US" smtClean="0"/>
-              <a:t>10/20/25</a:t>
+              <a:t>9/13/26</a:t>
             </a:fld>
             <a:endParaRPr lang="en-US"/>
           </a:p>
@@ -1894,7 +1894,7 @@
           <a:p>
             <a:fld id="{88791E44-5F57-7348-8B6B-4131483D2266}" type="datetimeFigureOut">
               <a:rPr lang="en-US" smtClean="0"/>
-              <a:t>10/20/25</a:t>
+              <a:t>9/13/26</a:t>
             </a:fld>
             <a:endParaRPr lang="en-US"/>
           </a:p>
@@ -2104,7 +2104,7 @@
           <a:p>
             <a:fld id="{88791E44-5F57-7348-8B6B-4131483D2266}" type="datetimeFigureOut">
               <a:rPr lang="en-US" smtClean="0"/>
-              <a:t>10/20/25</a:t>
+              <a:t>9/13/26</a:t>
             </a:fld>
             <a:endParaRPr lang="en-US"/>
           </a:p>
@@ -2304,7 +2304,7 @@
           <a:p>
             <a:fld id="{88791E44-5F57-7348-8B6B-4131483D2266}" type="datetimeFigureOut">
               <a:rPr lang="en-US" smtClean="0"/>
-              <a:t>10/20/25</a:t>
+              <a:t>9/13/26</a:t>
             </a:fld>
             <a:endParaRPr lang="en-US"/>
           </a:p>
@@ -2580,7 +2580,7 @@
           <a:p>
             <a:fld id="{88791E44-5F57-7348-8B6B-4131483D2266}" type="datetimeFigureOut">
               <a:rPr lang="en-US" smtClean="0"/>
-              <a:t>10/20/25</a:t>
+              <a:t>9/13/26</a:t>
             </a:fld>
             <a:endParaRPr lang="en-US"/>
           </a:p>
@@ -2848,7 +2848,7 @@
           <a:p>
             <a:fld id="{88791E44-5F57-7348-8B6B-4131483D2266}" type="datetimeFigureOut">
               <a:rPr lang="en-US" smtClean="0"/>
-              <a:t>10/20/25</a:t>
+              <a:t>9/13/26</a:t>
             </a:fld>
             <a:endParaRPr lang="en-US"/>
           </a:p>
@@ -3263,7 +3263,7 @@
           <a:p>
             <a:fld id="{88791E44-5F57-7348-8B6B-4131483D2266}" type="datetimeFigureOut">
               <a:rPr lang="en-US" smtClean="0"/>
-              <a:t>10/20/25</a:t>
+              <a:t>9/13/26</a:t>
             </a:fld>
             <a:endParaRPr lang="en-US"/>
           </a:p>
@@ -3405,7 +3405,7 @@
           <a:p>
             <a:fld id="{88791E44-5F57-7348-8B6B-4131483D2266}" type="datetimeFigureOut">
               <a:rPr lang="en-US" smtClean="0"/>
-              <a:t>10/20/25</a:t>
+              <a:t>9/13/26</a:t>
             </a:fld>
             <a:endParaRPr lang="en-US"/>
           </a:p>
@@ -3518,7 +3518,7 @@
           <a:p>
             <a:fld id="{88791E44-5F57-7348-8B6B-4131483D2266}" type="datetimeFigureOut">
               <a:rPr lang="en-US" smtClean="0"/>
-              <a:t>10/20/25</a:t>
+              <a:t>9/13/26</a:t>
             </a:fld>
             <a:endParaRPr lang="en-US"/>
           </a:p>
@@ -3831,7 +3831,7 @@
           <a:p>
             <a:fld id="{88791E44-5F57-7348-8B6B-4131483D2266}" type="datetimeFigureOut">
               <a:rPr lang="en-US" smtClean="0"/>
-              <a:t>10/20/25</a:t>
+              <a:t>9/13/26</a:t>
             </a:fld>
             <a:endParaRPr lang="en-US"/>
           </a:p>
@@ -4120,7 +4120,7 @@
           <a:p>
             <a:fld id="{88791E44-5F57-7348-8B6B-4131483D2266}" type="datetimeFigureOut">
               <a:rPr lang="en-US" smtClean="0"/>
-              <a:t>10/20/25</a:t>
+              <a:t>9/13/26</a:t>
             </a:fld>
             <a:endParaRPr lang="en-US"/>
           </a:p>
@@ -4363,7 +4363,7 @@
           <a:p>
             <a:fld id="{88791E44-5F57-7348-8B6B-4131483D2266}" type="datetimeFigureOut">
               <a:rPr lang="en-US" smtClean="0"/>
-              <a:t>10/20/25</a:t>
+              <a:t>9/13/26</a:t>
             </a:fld>
             <a:endParaRPr lang="en-US"/>
           </a:p>
@@ -5095,6 +5095,14 @@
 <file path=ppt/slides/slide3.xml><?xml version="1.0" encoding="utf-8"?>
 <p:sld xmlns:a="http://schemas.openxmlformats.org/drawingml/2006/main" xmlns:r="http://schemas.openxmlformats.org/officeDocument/2006/relationships" xmlns:p="http://schemas.openxmlformats.org/presentationml/2006/main">
   <p:cSld>
+    <p:bg>
+      <p:bgPr>
+        <a:solidFill>
+          <a:schemeClr val="bg1"/>
+        </a:solidFill>
+        <a:effectLst/>
+      </p:bgPr>
+    </p:bg>
     <p:spTree>
       <p:nvGrpSpPr>
         <p:cNvPr id="1" name=""/>
@@ -5111,10 +5119,10 @@
       </p:grpSpPr>
       <p:pic>
         <p:nvPicPr>
-          <p:cNvPr id="5" name="Picture 4">
-            <a:extLst>
-              <a:ext uri="{FF2B5EF4-FFF2-40B4-BE49-F238E27FC236}">
-                <a16:creationId xmlns:a16="http://schemas.microsoft.com/office/drawing/2014/main" id="{3599E135-2A2D-4D4D-A82A-9CF69A94A1B7}"/>
+          <p:cNvPr id="3" name="Picture 2">
+            <a:extLst>
+              <a:ext uri="{FF2B5EF4-FFF2-40B4-BE49-F238E27FC236}">
+                <a16:creationId xmlns:a16="http://schemas.microsoft.com/office/drawing/2014/main" id="{5AAD96DC-D999-F8E4-3FBD-D1A3FF383828}"/>
               </a:ext>
             </a:extLst>
           </p:cNvPr>
@@ -5131,8 +5139,8 @@
         </p:blipFill>
         <p:spPr>
           <a:xfrm>
-            <a:off x="1449421" y="223051"/>
-            <a:ext cx="9528045" cy="6411898"/>
+            <a:off x="643467" y="934466"/>
+            <a:ext cx="10905066" cy="4989067"/>
           </a:xfrm>
           <a:prstGeom prst="rect">
             <a:avLst/>
@@ -5155,6 +5163,14 @@
 <file path=ppt/slides/slide4.xml><?xml version="1.0" encoding="utf-8"?>
 <p:sld xmlns:a="http://schemas.openxmlformats.org/drawingml/2006/main" xmlns:r="http://schemas.openxmlformats.org/officeDocument/2006/relationships" xmlns:p="http://schemas.openxmlformats.org/presentationml/2006/main">
   <p:cSld>
+    <p:bg>
+      <p:bgPr>
+        <a:solidFill>
+          <a:schemeClr val="bg1"/>
+        </a:solidFill>
+        <a:effectLst/>
+      </p:bgPr>
+    </p:bg>
     <p:spTree>
       <p:nvGrpSpPr>
         <p:cNvPr id="1" name=""/>
@@ -5171,10 +5187,10 @@
       </p:grpSpPr>
       <p:pic>
         <p:nvPicPr>
-          <p:cNvPr id="7" name="Picture 6">
-            <a:extLst>
-              <a:ext uri="{FF2B5EF4-FFF2-40B4-BE49-F238E27FC236}">
-                <a16:creationId xmlns:a16="http://schemas.microsoft.com/office/drawing/2014/main" id="{AA51217C-2792-5242-9B20-ED9DC71B1899}"/>
+          <p:cNvPr id="3" name="Picture 2">
+            <a:extLst>
+              <a:ext uri="{FF2B5EF4-FFF2-40B4-BE49-F238E27FC236}">
+                <a16:creationId xmlns:a16="http://schemas.microsoft.com/office/drawing/2014/main" id="{D5DD6BB8-7D81-8914-D9BC-8C0A76265796}"/>
               </a:ext>
             </a:extLst>
           </p:cNvPr>
@@ -5191,8 +5207,8 @@
         </p:blipFill>
         <p:spPr>
           <a:xfrm>
-            <a:off x="1789888" y="531410"/>
-            <a:ext cx="8973971" cy="5795180"/>
+            <a:off x="643467" y="1070780"/>
+            <a:ext cx="10905066" cy="4716438"/>
           </a:xfrm>
           <a:prstGeom prst="rect">
             <a:avLst/>
@@ -5215,6 +5231,14 @@
 <file path=ppt/slides/slide5.xml><?xml version="1.0" encoding="utf-8"?>
 <p:sld xmlns:a="http://schemas.openxmlformats.org/drawingml/2006/main" xmlns:r="http://schemas.openxmlformats.org/officeDocument/2006/relationships" xmlns:p="http://schemas.openxmlformats.org/presentationml/2006/main">
   <p:cSld>
+    <p:bg>
+      <p:bgPr>
+        <a:solidFill>
+          <a:schemeClr val="bg1"/>
+        </a:solidFill>
+        <a:effectLst/>
+      </p:bgPr>
+    </p:bg>
     <p:spTree>
       <p:nvGrpSpPr>
         <p:cNvPr id="1" name=""/>
@@ -5231,10 +5255,10 @@
       </p:grpSpPr>
       <p:pic>
         <p:nvPicPr>
-          <p:cNvPr id="3" name="Picture 2">
-            <a:extLst>
-              <a:ext uri="{FF2B5EF4-FFF2-40B4-BE49-F238E27FC236}">
-                <a16:creationId xmlns:a16="http://schemas.microsoft.com/office/drawing/2014/main" id="{2F9FC876-9623-4542-9CED-7D1F8DA99E4E}"/>
+          <p:cNvPr id="4" name="Picture 3">
+            <a:extLst>
+              <a:ext uri="{FF2B5EF4-FFF2-40B4-BE49-F238E27FC236}">
+                <a16:creationId xmlns:a16="http://schemas.microsoft.com/office/drawing/2014/main" id="{535432F0-28C7-AB27-809D-8A0B61CDAFC3}"/>
               </a:ext>
             </a:extLst>
           </p:cNvPr>
@@ -5251,8 +5275,8 @@
         </p:blipFill>
         <p:spPr>
           <a:xfrm>
-            <a:off x="1332690" y="508576"/>
-            <a:ext cx="8455769" cy="6125688"/>
+            <a:off x="643467" y="920835"/>
+            <a:ext cx="10905066" cy="5016329"/>
           </a:xfrm>
           <a:prstGeom prst="rect">
             <a:avLst/>
@@ -5275,6 +5299,14 @@
 <file path=ppt/slides/slide6.xml><?xml version="1.0" encoding="utf-8"?>
 <p:sld xmlns:a="http://schemas.openxmlformats.org/drawingml/2006/main" xmlns:r="http://schemas.openxmlformats.org/officeDocument/2006/relationships" xmlns:p="http://schemas.openxmlformats.org/presentationml/2006/main">
   <p:cSld>
+    <p:bg>
+      <p:bgPr>
+        <a:solidFill>
+          <a:schemeClr val="bg1"/>
+        </a:solidFill>
+        <a:effectLst/>
+      </p:bgPr>
+    </p:bg>
     <p:spTree>
       <p:nvGrpSpPr>
         <p:cNvPr id="1" name=""/>
@@ -5291,10 +5323,10 @@
       </p:grpSpPr>
       <p:pic>
         <p:nvPicPr>
-          <p:cNvPr id="3" name="Picture 2">
-            <a:extLst>
-              <a:ext uri="{FF2B5EF4-FFF2-40B4-BE49-F238E27FC236}">
-                <a16:creationId xmlns:a16="http://schemas.microsoft.com/office/drawing/2014/main" id="{EB3EF1AE-8522-0C4D-A772-84E05EA624C9}"/>
+          <p:cNvPr id="4" name="Picture 3">
+            <a:extLst>
+              <a:ext uri="{FF2B5EF4-FFF2-40B4-BE49-F238E27FC236}">
+                <a16:creationId xmlns:a16="http://schemas.microsoft.com/office/drawing/2014/main" id="{5C15D77B-FF40-55E0-6D72-E598ED0DD3BA}"/>
               </a:ext>
             </a:extLst>
           </p:cNvPr>
@@ -5311,8 +5343,8 @@
         </p:blipFill>
         <p:spPr>
           <a:xfrm>
-            <a:off x="661481" y="656845"/>
-            <a:ext cx="10635574" cy="5879418"/>
+            <a:off x="643467" y="1029886"/>
+            <a:ext cx="10905066" cy="4798226"/>
           </a:xfrm>
           <a:prstGeom prst="rect">
             <a:avLst/>
@@ -5335,6 +5367,14 @@
 <file path=ppt/slides/slide7.xml><?xml version="1.0" encoding="utf-8"?>
 <p:sld xmlns:a="http://schemas.openxmlformats.org/drawingml/2006/main" xmlns:r="http://schemas.openxmlformats.org/officeDocument/2006/relationships" xmlns:p="http://schemas.openxmlformats.org/presentationml/2006/main">
   <p:cSld>
+    <p:bg>
+      <p:bgPr>
+        <a:solidFill>
+          <a:schemeClr val="bg1"/>
+        </a:solidFill>
+        <a:effectLst/>
+      </p:bgPr>
+    </p:bg>
     <p:spTree>
       <p:nvGrpSpPr>
         <p:cNvPr id="1" name=""/>
@@ -5351,10 +5391,10 @@
       </p:grpSpPr>
       <p:pic>
         <p:nvPicPr>
-          <p:cNvPr id="3" name="Picture 2">
-            <a:extLst>
-              <a:ext uri="{FF2B5EF4-FFF2-40B4-BE49-F238E27FC236}">
-                <a16:creationId xmlns:a16="http://schemas.microsoft.com/office/drawing/2014/main" id="{2185DB91-38C0-0E49-BD90-468913506BC1}"/>
+          <p:cNvPr id="4" name="Picture 3">
+            <a:extLst>
+              <a:ext uri="{FF2B5EF4-FFF2-40B4-BE49-F238E27FC236}">
+                <a16:creationId xmlns:a16="http://schemas.microsoft.com/office/drawing/2014/main" id="{BEE12FBE-534E-DA14-1A64-C8062173DC48}"/>
               </a:ext>
             </a:extLst>
           </p:cNvPr>
@@ -5371,8 +5411,8 @@
         </p:blipFill>
         <p:spPr>
           <a:xfrm>
-            <a:off x="657297" y="945890"/>
-            <a:ext cx="10367384" cy="5503548"/>
+            <a:off x="643467" y="893571"/>
+            <a:ext cx="10905066" cy="5070856"/>
           </a:xfrm>
           <a:prstGeom prst="rect">
             <a:avLst/>
